--- a/Boares_Gunza___Rita_Manuel.pptx
+++ b/Boares_Gunza___Rita_Manuel.pptx
@@ -211,7 +211,7 @@
           <a:p>
             <a:fld id="{CAF67ED6-940C-4B25-A3B0-3D1173FD4308}" type="datetimeFigureOut">
               <a:rPr lang="en-US" smtClean="0"/>
-              <a:t>7/15/2026</a:t>
+              <a:t>7/18/2026</a:t>
             </a:fld>
             <a:endParaRPr lang="en-US"/>
           </a:p>
@@ -3418,7 +3418,7 @@
                 <a:tabLst/>
                 <a:defRPr/>
               </a:pPr>
-              <a:t>7/15/2026</a:t>
+              <a:t>7/18/2026</a:t>
             </a:fld>
             <a:endParaRPr kumimoji="0" lang="en-US" sz="1000" b="0" i="0" u="none" strike="noStrike" kern="1200" cap="none" spc="0" normalizeH="0" baseline="0" noProof="0">
               <a:ln>
@@ -4014,7 +4014,7 @@
                 <a:tabLst/>
                 <a:defRPr/>
               </a:pPr>
-              <a:t>7/15/2026</a:t>
+              <a:t>7/18/2026</a:t>
             </a:fld>
             <a:endParaRPr kumimoji="0" lang="en-US" sz="1000" b="0" i="0" u="none" strike="noStrike" kern="1200" cap="none" spc="0" normalizeH="0" baseline="0" noProof="0">
               <a:ln>
@@ -4424,7 +4424,7 @@
                 <a:tabLst/>
                 <a:defRPr/>
               </a:pPr>
-              <a:t>7/15/2026</a:t>
+              <a:t>7/18/2026</a:t>
             </a:fld>
             <a:endParaRPr kumimoji="0" lang="en-US" sz="1000" b="0" i="0" u="none" strike="noStrike" kern="1200" cap="none" spc="0" normalizeH="0" baseline="0" noProof="0">
               <a:ln>
@@ -4892,7 +4892,7 @@
                 <a:tabLst/>
                 <a:defRPr/>
               </a:pPr>
-              <a:t>7/15/2026</a:t>
+              <a:t>7/18/2026</a:t>
             </a:fld>
             <a:endParaRPr kumimoji="0" lang="en-US" sz="1000" b="0" i="0" u="none" strike="noStrike" kern="1200" cap="none" spc="0" normalizeH="0" baseline="0" noProof="0">
               <a:ln>
@@ -5418,7 +5418,7 @@
                 <a:tabLst/>
                 <a:defRPr/>
               </a:pPr>
-              <a:t>7/15/2026</a:t>
+              <a:t>7/18/2026</a:t>
             </a:fld>
             <a:endParaRPr kumimoji="0" lang="en-US" sz="1000" b="0" i="0" u="none" strike="noStrike" kern="1200" cap="none" spc="0" normalizeH="0" baseline="0" noProof="0">
               <a:ln>
@@ -5880,7 +5880,7 @@
                 <a:tabLst/>
                 <a:defRPr/>
               </a:pPr>
-              <a:t>7/15/2026</a:t>
+              <a:t>7/18/2026</a:t>
             </a:fld>
             <a:endParaRPr kumimoji="0" lang="en-US" sz="1000" b="0" i="0" u="none" strike="noStrike" kern="1200" cap="none" spc="0" normalizeH="0" baseline="0" noProof="0">
               <a:ln>
@@ -6455,7 +6455,7 @@
                 <a:tabLst/>
                 <a:defRPr/>
               </a:pPr>
-              <a:t>7/15/2026</a:t>
+              <a:t>7/18/2026</a:t>
             </a:fld>
             <a:endParaRPr kumimoji="0" lang="en-US" sz="1000" b="0" i="0" u="none" strike="noStrike" kern="1200" cap="none" spc="0" normalizeH="0" baseline="0" noProof="0">
               <a:ln>
@@ -6789,7 +6789,7 @@
                 <a:tabLst/>
                 <a:defRPr/>
               </a:pPr>
-              <a:t>7/15/2026</a:t>
+              <a:t>7/18/2026</a:t>
             </a:fld>
             <a:endParaRPr kumimoji="0" lang="en-US" sz="1000" b="0" i="0" u="none" strike="noStrike" kern="1200" cap="none" spc="0" normalizeH="0" baseline="0" noProof="0">
               <a:ln>
@@ -7129,7 +7129,7 @@
                 <a:tabLst/>
                 <a:defRPr/>
               </a:pPr>
-              <a:t>7/15/2026</a:t>
+              <a:t>7/18/2026</a:t>
             </a:fld>
             <a:endParaRPr kumimoji="0" lang="en-US" sz="1000" b="0" i="0" u="none" strike="noStrike" kern="1200" cap="none" spc="0" normalizeH="0" baseline="0" noProof="0">
               <a:ln>
@@ -7459,7 +7459,7 @@
                 <a:tabLst/>
                 <a:defRPr/>
               </a:pPr>
-              <a:t>7/15/2026</a:t>
+              <a:t>7/18/2026</a:t>
             </a:fld>
             <a:endParaRPr kumimoji="0" lang="en-US" sz="1000" b="0" i="0" u="none" strike="noStrike" kern="1200" cap="none" spc="0" normalizeH="0" baseline="0" noProof="0">
               <a:ln>
@@ -7869,7 +7869,7 @@
                 <a:tabLst/>
                 <a:defRPr/>
               </a:pPr>
-              <a:t>7/15/2026</a:t>
+              <a:t>7/18/2026</a:t>
             </a:fld>
             <a:endParaRPr kumimoji="0" lang="en-US" sz="1000" b="0" i="0" u="none" strike="noStrike" kern="1200" cap="none" spc="0" normalizeH="0" baseline="0" noProof="0">
               <a:ln>
@@ -8265,7 +8265,7 @@
                 <a:tabLst/>
                 <a:defRPr/>
               </a:pPr>
-              <a:t>7/15/2026</a:t>
+              <a:t>7/18/2026</a:t>
             </a:fld>
             <a:endParaRPr kumimoji="0" lang="en-US" sz="1000" b="0" i="0" u="none" strike="noStrike" kern="1200" cap="none" spc="0" normalizeH="0" baseline="0" noProof="0">
               <a:ln>
@@ -8807,7 +8807,7 @@
                 <a:tabLst/>
                 <a:defRPr/>
               </a:pPr>
-              <a:t>7/15/2026</a:t>
+              <a:t>7/18/2026</a:t>
             </a:fld>
             <a:endParaRPr kumimoji="0" lang="en-US" sz="1000" b="0" i="0" u="none" strike="noStrike" kern="1200" cap="none" spc="0" normalizeH="0" baseline="0" noProof="0">
               <a:ln>
@@ -9085,7 +9085,7 @@
                 <a:tabLst/>
                 <a:defRPr/>
               </a:pPr>
-              <a:t>7/15/2026</a:t>
+              <a:t>7/18/2026</a:t>
             </a:fld>
             <a:endParaRPr kumimoji="0" lang="en-US" sz="1000" b="0" i="0" u="none" strike="noStrike" kern="1200" cap="none" spc="0" normalizeH="0" baseline="0" noProof="0">
               <a:ln>
@@ -9340,7 +9340,7 @@
                 <a:tabLst/>
                 <a:defRPr/>
               </a:pPr>
-              <a:t>7/15/2026</a:t>
+              <a:t>7/18/2026</a:t>
             </a:fld>
             <a:endParaRPr kumimoji="0" lang="en-US" sz="1000" b="0" i="0" u="none" strike="noStrike" kern="1200" cap="none" spc="0" normalizeH="0" baseline="0" noProof="0">
               <a:ln>
@@ -9755,7 +9755,7 @@
                 <a:tabLst/>
                 <a:defRPr/>
               </a:pPr>
-              <a:t>7/15/2026</a:t>
+              <a:t>7/18/2026</a:t>
             </a:fld>
             <a:endParaRPr kumimoji="0" lang="en-US" sz="1000" b="0" i="0" u="none" strike="noStrike" kern="1200" cap="none" spc="0" normalizeH="0" baseline="0" noProof="0">
               <a:ln>
@@ -10198,7 +10198,7 @@
                 <a:tabLst/>
                 <a:defRPr/>
               </a:pPr>
-              <a:t>7/15/2026</a:t>
+              <a:t>7/18/2026</a:t>
             </a:fld>
             <a:endParaRPr kumimoji="0" lang="en-US" sz="1000" b="0" i="0" u="none" strike="noStrike" kern="1200" cap="none" spc="0" normalizeH="0" baseline="0" noProof="0">
               <a:ln>
@@ -10764,7 +10764,7 @@
                 <a:tabLst/>
                 <a:defRPr/>
               </a:pPr>
-              <a:t>7/15/2026</a:t>
+              <a:t>7/18/2026</a:t>
             </a:fld>
             <a:endParaRPr kumimoji="0" lang="en-US" sz="1000" b="0" i="0" u="none" strike="noStrike" kern="1200" cap="none" spc="0" normalizeH="0" baseline="0" noProof="0">
               <a:ln>
@@ -15310,12 +15310,6 @@
               </a:rPr>
               <a:t>.</a:t>
             </a:r>
-            <a:endParaRPr lang="en-US" dirty="0">
-              <a:solidFill>
-                <a:schemeClr val="bg1"/>
-              </a:solidFill>
-              <a:latin typeface="Arial Rounded MT Bold" panose="020F0704030504030204" pitchFamily="34" charset="0"/>
-            </a:endParaRPr>
           </a:p>
         </p:txBody>
       </p:sp>
@@ -15358,7 +15352,7 @@
         <p:spPr>
           <a:xfrm>
             <a:off x="432469" y="1434591"/>
-            <a:ext cx="11561057" cy="4031873"/>
+            <a:ext cx="11561057" cy="4401205"/>
           </a:xfrm>
           <a:prstGeom prst="rect">
             <a:avLst/>
@@ -15372,7 +15366,7 @@
           <a:p>
             <a:pPr algn="just"/>
             <a:r>
-              <a:rPr lang="pt-BR" sz="3200" b="1" dirty="0" smtClean="0">
+              <a:rPr lang="pt-BR" sz="2800" b="1" dirty="0" smtClean="0">
                 <a:solidFill>
                   <a:schemeClr val="bg1"/>
                 </a:solidFill>
@@ -15380,7 +15374,7 @@
               <a:t>O </a:t>
             </a:r>
             <a:r>
-              <a:rPr lang="pt-BR" sz="3200" b="1" dirty="0">
+              <a:rPr lang="pt-BR" sz="2800" b="1" dirty="0">
                 <a:solidFill>
                   <a:schemeClr val="bg1"/>
                 </a:solidFill>
@@ -15388,7 +15382,7 @@
               <a:t>Mini </a:t>
             </a:r>
             <a:r>
-              <a:rPr lang="pt-BR" sz="3200" b="1" dirty="0" err="1">
+              <a:rPr lang="pt-BR" sz="2800" b="1" dirty="0" err="1">
                 <a:solidFill>
                   <a:schemeClr val="bg1"/>
                 </a:solidFill>
@@ -15396,7 +15390,7 @@
               <a:t>Dropbox</a:t>
             </a:r>
             <a:r>
-              <a:rPr lang="pt-BR" sz="3200" b="1" dirty="0">
+              <a:rPr lang="pt-BR" sz="2800" b="1" dirty="0">
                 <a:solidFill>
                   <a:schemeClr val="bg1"/>
                 </a:solidFill>
@@ -15404,7 +15398,7 @@
               <a:t> Distribuído demonstra como é possível integrar</a:t>
             </a:r>
             <a:r>
-              <a:rPr lang="pt-BR" sz="3200" b="1" dirty="0" smtClean="0">
+              <a:rPr lang="pt-BR" sz="2800" b="1" dirty="0" smtClean="0">
                 <a:solidFill>
                   <a:schemeClr val="bg1"/>
                 </a:solidFill>
@@ -15412,7 +15406,7 @@
               <a:t>:  </a:t>
             </a:r>
             <a:r>
-              <a:rPr lang="pt-BR" sz="3200" b="1" dirty="0">
+              <a:rPr lang="pt-BR" sz="2800" b="1" dirty="0">
                 <a:solidFill>
                   <a:schemeClr val="bg1"/>
                 </a:solidFill>
@@ -15420,7 +15414,7 @@
               <a:t>armazenamento de ficheiros</a:t>
             </a:r>
             <a:r>
-              <a:rPr lang="pt-BR" sz="3200" b="1" dirty="0" smtClean="0">
+              <a:rPr lang="pt-BR" sz="2800" b="1" dirty="0" smtClean="0">
                 <a:solidFill>
                   <a:schemeClr val="bg1"/>
                 </a:solidFill>
@@ -15428,7 +15422,7 @@
               <a:t>; </a:t>
             </a:r>
             <a:r>
-              <a:rPr lang="pt-BR" sz="3200" b="1" dirty="0">
+              <a:rPr lang="pt-BR" sz="2800" b="1" dirty="0">
                 <a:solidFill>
                   <a:schemeClr val="bg1"/>
                 </a:solidFill>
@@ -15436,7 +15430,7 @@
               <a:t>sistemas distribuídos</a:t>
             </a:r>
             <a:r>
-              <a:rPr lang="pt-BR" sz="3200" b="1" dirty="0" smtClean="0">
+              <a:rPr lang="pt-BR" sz="2800" b="1" dirty="0" smtClean="0">
                 <a:solidFill>
                   <a:schemeClr val="bg1"/>
                 </a:solidFill>
@@ -15444,7 +15438,7 @@
               <a:t>; </a:t>
             </a:r>
             <a:r>
-              <a:rPr lang="pt-BR" sz="3200" b="1" dirty="0">
+              <a:rPr lang="pt-BR" sz="2800" b="1" dirty="0">
                 <a:solidFill>
                   <a:schemeClr val="bg1"/>
                 </a:solidFill>
@@ -15452,7 +15446,7 @@
               <a:t>replicação</a:t>
             </a:r>
             <a:r>
-              <a:rPr lang="pt-BR" sz="3200" b="1" dirty="0" smtClean="0">
+              <a:rPr lang="pt-BR" sz="2800" b="1" dirty="0" smtClean="0">
                 <a:solidFill>
                   <a:schemeClr val="bg1"/>
                 </a:solidFill>
@@ -15460,7 +15454,7 @@
               <a:t>; </a:t>
             </a:r>
             <a:r>
-              <a:rPr lang="pt-BR" sz="3200" b="1" dirty="0">
+              <a:rPr lang="pt-BR" sz="2800" b="1" dirty="0">
                 <a:solidFill>
                   <a:schemeClr val="bg1"/>
                 </a:solidFill>
@@ -15468,7 +15462,7 @@
               <a:t>bases de dados espaciais</a:t>
             </a:r>
             <a:r>
-              <a:rPr lang="pt-BR" sz="3200" b="1" dirty="0" smtClean="0">
+              <a:rPr lang="pt-BR" sz="2800" b="1" dirty="0" smtClean="0">
                 <a:solidFill>
                   <a:schemeClr val="bg1"/>
                 </a:solidFill>
@@ -15476,7 +15470,7 @@
               <a:t>; </a:t>
             </a:r>
             <a:r>
-              <a:rPr lang="pt-BR" sz="3200" b="1" dirty="0">
+              <a:rPr lang="pt-BR" sz="2800" b="1" dirty="0">
                 <a:solidFill>
                   <a:schemeClr val="bg1"/>
                 </a:solidFill>
@@ -15484,7 +15478,7 @@
               <a:t>recuperação de dados</a:t>
             </a:r>
             <a:r>
-              <a:rPr lang="pt-BR" sz="3200" b="1" dirty="0" smtClean="0">
+              <a:rPr lang="pt-BR" sz="2800" b="1" dirty="0" smtClean="0">
                 <a:solidFill>
                   <a:schemeClr val="bg1"/>
                 </a:solidFill>
@@ -15492,7 +15486,7 @@
               <a:t>. Apesar </a:t>
             </a:r>
             <a:r>
-              <a:rPr lang="pt-BR" sz="3200" b="1" dirty="0">
+              <a:rPr lang="pt-BR" sz="2800" b="1" dirty="0">
                 <a:solidFill>
                   <a:schemeClr val="bg1"/>
                 </a:solidFill>
@@ -15500,14 +15494,14 @@
               <a:t>de ser uma simulação executada numa única máquina, a arquitetura foi desenvolvida para representar o funcionamento de um sistema distribuído real, evidenciando conceitos de disponibilidade, redundância e tolerância a falhas</a:t>
             </a:r>
             <a:r>
-              <a:rPr lang="pt-BR" sz="3200" b="1" dirty="0" smtClean="0">
+              <a:rPr lang="pt-BR" sz="2800" b="1" dirty="0" smtClean="0">
                 <a:solidFill>
                   <a:schemeClr val="bg1"/>
                 </a:solidFill>
               </a:rPr>
               <a:t>. O projeto demonstra que é possível desenvolver uma solução distribuída funcional utilizando tecnologias acessíveis, constituindo uma base para futuras implementações em ambientes reais.</a:t>
             </a:r>
-            <a:endParaRPr lang="pt-BR" sz="3200" b="1" dirty="0">
+            <a:endParaRPr lang="pt-BR" sz="2800" b="1" dirty="0">
               <a:solidFill>
                 <a:schemeClr val="bg1"/>
               </a:solidFill>
@@ -16269,19 +16263,6 @@
               </a:rPr>
               <a:t>;</a:t>
             </a:r>
-            <a:endParaRPr kumimoji="0" lang="en-US" altLang="en-US" sz="2300" b="0" i="0" u="none" strike="noStrike" kern="1200" cap="none" spc="0" normalizeH="0" baseline="0" noProof="0" dirty="0" smtClean="0">
-              <a:ln>
-                <a:noFill/>
-              </a:ln>
-              <a:solidFill>
-                <a:prstClr val="black"/>
-              </a:solidFill>
-              <a:effectLst/>
-              <a:uLnTx/>
-              <a:uFillTx/>
-              <a:latin typeface="Arial Rounded MT Bold" panose="020F0704030504030204" pitchFamily="34" charset="0"/>
-              <a:cs typeface="Times New Roman" panose="02020603050405020304" pitchFamily="18" charset="0"/>
-            </a:endParaRPr>
           </a:p>
           <a:p>
             <a:pPr marL="0" marR="0" lvl="0" indent="0" algn="just" defTabSz="914400" rtl="0" eaLnBrk="1" fontAlgn="auto" latinLnBrk="0" hangingPunct="1">
@@ -16315,7 +16296,23 @@
                 <a:latin typeface="Arial Rounded MT Bold" panose="020F0704030504030204" pitchFamily="34" charset="0"/>
                 <a:cs typeface="Times New Roman" panose="02020603050405020304" pitchFamily="18" charset="0"/>
               </a:rPr>
-              <a:t>	</a:t>
+              <a:t>	1.3. </a:t>
+            </a:r>
+            <a:r>
+              <a:rPr kumimoji="0" lang="en-US" altLang="en-US" sz="2300" b="0" i="0" u="none" strike="noStrike" kern="1200" cap="none" spc="0" normalizeH="0" baseline="0" noProof="0" dirty="0" err="1" smtClean="0">
+                <a:ln>
+                  <a:noFill/>
+                </a:ln>
+                <a:solidFill>
+                  <a:prstClr val="black"/>
+                </a:solidFill>
+                <a:effectLst/>
+                <a:uLnTx/>
+                <a:uFillTx/>
+                <a:latin typeface="Arial Rounded MT Bold" panose="020F0704030504030204" pitchFamily="34" charset="0"/>
+                <a:cs typeface="Times New Roman" panose="02020603050405020304" pitchFamily="18" charset="0"/>
+              </a:rPr>
+              <a:t>Objectivos</a:t>
             </a:r>
             <a:r>
               <a:rPr kumimoji="0" lang="en-US" altLang="en-US" sz="2300" b="0" i="0" u="none" strike="noStrike" kern="1200" cap="none" spc="0" normalizeH="0" baseline="0" noProof="0" dirty="0" smtClean="0">
@@ -16331,53 +16328,8 @@
                 <a:latin typeface="Arial Rounded MT Bold" panose="020F0704030504030204" pitchFamily="34" charset="0"/>
                 <a:cs typeface="Times New Roman" panose="02020603050405020304" pitchFamily="18" charset="0"/>
               </a:rPr>
-              <a:t>1.3. </a:t>
-            </a:r>
-            <a:r>
-              <a:rPr kumimoji="0" lang="en-US" altLang="en-US" sz="2300" b="0" i="0" u="none" strike="noStrike" kern="1200" cap="none" spc="0" normalizeH="0" baseline="0" noProof="0" dirty="0" err="1" smtClean="0">
-                <a:ln>
-                  <a:noFill/>
-                </a:ln>
-                <a:solidFill>
-                  <a:prstClr val="black"/>
-                </a:solidFill>
-                <a:effectLst/>
-                <a:uLnTx/>
-                <a:uFillTx/>
-                <a:latin typeface="Arial Rounded MT Bold" panose="020F0704030504030204" pitchFamily="34" charset="0"/>
-                <a:cs typeface="Times New Roman" panose="02020603050405020304" pitchFamily="18" charset="0"/>
-              </a:rPr>
-              <a:t>Objectivos</a:t>
-            </a:r>
-            <a:r>
-              <a:rPr kumimoji="0" lang="en-US" altLang="en-US" sz="2300" b="0" i="0" u="none" strike="noStrike" kern="1200" cap="none" spc="0" normalizeH="0" baseline="0" noProof="0" dirty="0" smtClean="0">
-                <a:ln>
-                  <a:noFill/>
-                </a:ln>
-                <a:solidFill>
-                  <a:prstClr val="black"/>
-                </a:solidFill>
-                <a:effectLst/>
-                <a:uLnTx/>
-                <a:uFillTx/>
-                <a:latin typeface="Arial Rounded MT Bold" panose="020F0704030504030204" pitchFamily="34" charset="0"/>
-                <a:cs typeface="Times New Roman" panose="02020603050405020304" pitchFamily="18" charset="0"/>
-              </a:rPr>
               <a:t>.</a:t>
             </a:r>
-            <a:endParaRPr kumimoji="0" lang="en-US" altLang="en-US" sz="2300" b="0" i="0" u="none" strike="noStrike" kern="1200" cap="none" spc="0" normalizeH="0" baseline="0" noProof="0" dirty="0" smtClean="0">
-              <a:ln>
-                <a:noFill/>
-              </a:ln>
-              <a:solidFill>
-                <a:prstClr val="black"/>
-              </a:solidFill>
-              <a:effectLst/>
-              <a:uLnTx/>
-              <a:uFillTx/>
-              <a:latin typeface="Arial Rounded MT Bold" panose="020F0704030504030204" pitchFamily="34" charset="0"/>
-              <a:cs typeface="Times New Roman" panose="02020603050405020304" pitchFamily="18" charset="0"/>
-            </a:endParaRPr>
           </a:p>
           <a:p>
             <a:pPr algn="just">
@@ -16876,7 +16828,7 @@
         <p:spPr>
           <a:xfrm>
             <a:off x="210314" y="1191666"/>
-            <a:ext cx="11639178" cy="5262979"/>
+            <a:ext cx="11639178" cy="4832092"/>
           </a:xfrm>
           <a:prstGeom prst="rect">
             <a:avLst/>
@@ -16896,16 +16848,16 @@
                 </a:solidFill>
                 <a:latin typeface="Arial Rounded MT Bold" panose="020F0704030504030204" pitchFamily="34" charset="0"/>
               </a:rPr>
-              <a:t>A </a:t>
-            </a:r>
-            <a:r>
-              <a:rPr lang="pt-BR" sz="2800" b="1" dirty="0">
-                <a:solidFill>
-                  <a:schemeClr val="bg1"/>
-                </a:solidFill>
-                <a:latin typeface="Arial Rounded MT Bold" panose="020F0704030504030204" pitchFamily="34" charset="0"/>
-              </a:rPr>
-              <a:t>Mini Dropbox Distribuída</a:t>
+              <a:t>A Mini </a:t>
+            </a:r>
+            <a:r>
+              <a:rPr lang="pt-BR" sz="2800" dirty="0" err="1">
+                <a:solidFill>
+                  <a:schemeClr val="bg1"/>
+                </a:solidFill>
+                <a:latin typeface="Arial Rounded MT Bold" panose="020F0704030504030204" pitchFamily="34" charset="0"/>
+              </a:rPr>
+              <a:t>Dropbox</a:t>
             </a:r>
             <a:r>
               <a:rPr lang="pt-BR" sz="2800" dirty="0">
@@ -16914,10 +16866,10 @@
                 </a:solidFill>
                 <a:latin typeface="Arial Rounded MT Bold" panose="020F0704030504030204" pitchFamily="34" charset="0"/>
               </a:rPr>
-              <a:t> é uma aplicação web desenvolvida em </a:t>
-            </a:r>
-            <a:r>
-              <a:rPr lang="pt-BR" sz="2800" b="1" dirty="0">
+              <a:t> Distribuída é uma aplicação web desenvolvida em </a:t>
+            </a:r>
+            <a:r>
+              <a:rPr lang="pt-BR" sz="2800" dirty="0" err="1">
                 <a:solidFill>
                   <a:schemeClr val="bg1"/>
                 </a:solidFill>
@@ -16935,7 +16887,7 @@
               <a:t> e </a:t>
             </a:r>
             <a:r>
-              <a:rPr lang="pt-BR" sz="2800" b="1" dirty="0">
+              <a:rPr lang="pt-BR" sz="2800" dirty="0" err="1">
                 <a:solidFill>
                   <a:schemeClr val="bg1"/>
                 </a:solidFill>
@@ -16950,16 +16902,16 @@
                 </a:solidFill>
                 <a:latin typeface="Arial Rounded MT Bold" panose="020F0704030504030204" pitchFamily="34" charset="0"/>
               </a:rPr>
-              <a:t> que simula um sistema de armazenamento e partilha de ficheiros de forma segura, organizada e eficiente. O projeto integra conceitos de </a:t>
-            </a:r>
-            <a:r>
-              <a:rPr lang="pt-BR" sz="2800" b="1" dirty="0">
-                <a:solidFill>
-                  <a:schemeClr val="bg1"/>
-                </a:solidFill>
-                <a:latin typeface="Arial Rounded MT Bold" panose="020F0704030504030204" pitchFamily="34" charset="0"/>
-              </a:rPr>
-              <a:t>Sistemas Distribuídos</a:t>
+              <a:t> que simula um sistema de armazenamento e partilha de ficheiros de forma segura, organizada e eficiente. O projeto integra conceitos de Sistemas Distribuídos e Bases de Dados, implementando mecanismos de replicação de ficheiros, gestão de </a:t>
+            </a:r>
+            <a:r>
+              <a:rPr lang="pt-BR" sz="2800" dirty="0" err="1">
+                <a:solidFill>
+                  <a:schemeClr val="bg1"/>
+                </a:solidFill>
+                <a:latin typeface="Arial Rounded MT Bold" panose="020F0704030504030204" pitchFamily="34" charset="0"/>
+              </a:rPr>
+              <a:t>metadados</a:t>
             </a:r>
             <a:r>
               <a:rPr lang="pt-BR" sz="2800" dirty="0">
@@ -16968,16 +16920,16 @@
                 </a:solidFill>
                 <a:latin typeface="Arial Rounded MT Bold" panose="020F0704030504030204" pitchFamily="34" charset="0"/>
               </a:rPr>
-              <a:t> e </a:t>
-            </a:r>
-            <a:r>
-              <a:rPr lang="pt-BR" sz="2800" b="1" dirty="0">
-                <a:solidFill>
-                  <a:schemeClr val="bg1"/>
-                </a:solidFill>
-                <a:latin typeface="Arial Rounded MT Bold" panose="020F0704030504030204" pitchFamily="34" charset="0"/>
-              </a:rPr>
-              <a:t>Bases de Dados</a:t>
+              <a:t>, autenticação de utilizadores e recuperação de dados em caso de falhas. Além disso, utiliza o índice espacial R-</a:t>
+            </a:r>
+            <a:r>
+              <a:rPr lang="pt-BR" sz="2800" dirty="0" err="1">
+                <a:solidFill>
+                  <a:schemeClr val="bg1"/>
+                </a:solidFill>
+                <a:latin typeface="Arial Rounded MT Bold" panose="020F0704030504030204" pitchFamily="34" charset="0"/>
+              </a:rPr>
+              <a:t>tree</a:t>
             </a:r>
             <a:r>
               <a:rPr lang="pt-BR" sz="2800" dirty="0">
@@ -16986,26 +16938,14 @@
                 </a:solidFill>
                 <a:latin typeface="Arial Rounded MT Bold" panose="020F0704030504030204" pitchFamily="34" charset="0"/>
               </a:rPr>
-              <a:t>, implementando mecanismos de replicação de ficheiros, gestão de metadados, autenticação de utilizadores e recuperação de dados em caso de falhas. Além disso, utiliza o índice espacial </a:t>
-            </a:r>
-            <a:r>
-              <a:rPr lang="pt-BR" sz="2800" b="1" dirty="0">
-                <a:solidFill>
-                  <a:schemeClr val="bg1"/>
-                </a:solidFill>
-                <a:latin typeface="Arial Rounded MT Bold" panose="020F0704030504030204" pitchFamily="34" charset="0"/>
-              </a:rPr>
-              <a:t>R-tree</a:t>
-            </a:r>
-            <a:r>
-              <a:rPr lang="pt-BR" sz="2800" dirty="0">
-                <a:solidFill>
-                  <a:schemeClr val="bg1"/>
-                </a:solidFill>
-                <a:latin typeface="Arial Rounded MT Bold" panose="020F0704030504030204" pitchFamily="34" charset="0"/>
-              </a:rPr>
               <a:t> para identificar o nó mais próximo do utilizador durante o processo de download, demonstrando a aplicação prática de técnicas de armazenamento distribuído, disponibilidade, tolerância a falhas e otimização na recuperação da informação.</a:t>
             </a:r>
+            <a:endParaRPr lang="pt-BR" sz="2800" dirty="0">
+              <a:solidFill>
+                <a:schemeClr val="bg1"/>
+              </a:solidFill>
+              <a:latin typeface="Arial Rounded MT Bold" panose="020F0704030504030204" pitchFamily="34" charset="0"/>
+            </a:endParaRPr>
           </a:p>
         </p:txBody>
       </p:sp>
@@ -17325,12 +17265,6 @@
               </a:rPr>
               <a:t>. A integração destas áreas permite criar um sistema capaz de armazenar ficheiros, gerir informações dos utilizadores e assegurar a disponibilidade dos dados através da replicação entre servidores.</a:t>
             </a:r>
-            <a:endParaRPr lang="pt-BR" sz="2400" dirty="0">
-              <a:solidFill>
-                <a:schemeClr val="bg1"/>
-              </a:solidFill>
-              <a:latin typeface="Arial Rounded MT Bold" panose="020F0704030504030204" pitchFamily="34" charset="0"/>
-            </a:endParaRPr>
           </a:p>
         </p:txBody>
       </p:sp>
